--- a/README.pptx
+++ b/README.pptx
@@ -3909,7 +3909,7 @@
         <p:spPr>
           <a:xfrm>
             <a:off x="949325" y="703580"/>
-            <a:ext cx="7326630" cy="922020"/>
+            <a:ext cx="7326630" cy="1476375"/>
           </a:xfrm>
           <a:prstGeom prst="rect">
             <a:avLst/>
@@ -3946,11 +3946,11 @@
             </a:r>
             <a:r>
               <a:rPr lang="zh-CN" altLang="en-US"/>
-              <a:t>上线，包含基础</a:t>
+              <a:t>，上线，包含基础</a:t>
             </a:r>
             <a:r>
               <a:rPr lang="zh-CN" altLang="en-US"/>
-              <a:t>功能</a:t>
+              <a:t>功能。</a:t>
             </a:r>
             <a:endParaRPr lang="zh-CN" altLang="en-US"/>
           </a:p>
@@ -3965,15 +3965,46 @@
             </a:r>
             <a:r>
               <a:rPr lang="en-US" altLang="zh-CN"/>
-              <a:t>V3.1.0,</a:t>
+              <a:t>V3.1.0</a:t>
             </a:r>
             <a:r>
               <a:rPr lang="zh-CN" altLang="en-US"/>
-              <a:t>新增散点图的彩色绘制</a:t>
+              <a:t>，新增散点图的彩色绘制</a:t>
             </a:r>
             <a:r>
               <a:rPr lang="zh-CN" altLang="en-US"/>
-              <a:t>功能</a:t>
+              <a:t>功能。</a:t>
+            </a:r>
+            <a:endParaRPr lang="zh-CN" altLang="en-US"/>
+          </a:p>
+          <a:p>
+            <a:r>
+              <a:rPr lang="en-US" altLang="zh-CN"/>
+              <a:t>2026.09.09</a:t>
+            </a:r>
+            <a:r>
+              <a:rPr lang="zh-CN" altLang="en-US"/>
+              <a:t>：</a:t>
+            </a:r>
+            <a:r>
+              <a:rPr lang="en-US" altLang="zh-CN"/>
+              <a:t>V4.0.0</a:t>
+            </a:r>
+            <a:r>
+              <a:rPr lang="zh-CN" altLang="en-US"/>
+              <a:t>，优化界面生成逻辑，减少卡顿，美化</a:t>
+            </a:r>
+            <a:r>
+              <a:rPr lang="en-US" altLang="zh-CN"/>
+              <a:t>ui</a:t>
+            </a:r>
+            <a:r>
+              <a:rPr lang="zh-CN" altLang="en-US"/>
+              <a:t>，增强了互动反馈，新增数据清洗，结果导出，文件路径和窗口大小记忆</a:t>
+            </a:r>
+            <a:r>
+              <a:rPr lang="zh-CN" altLang="en-US"/>
+              <a:t>功能。</a:t>
             </a:r>
             <a:endParaRPr lang="zh-CN" altLang="en-US"/>
           </a:p>

--- a/README.pptx
+++ b/README.pptx
@@ -3286,9 +3286,169 @@
           </a:p>
         </p:txBody>
       </p:sp>
+      <p:sp>
+        <p:nvSpPr>
+          <p:cNvPr id="6" name="文本框 5"/>
+          <p:cNvSpPr txBox="1"/>
+          <p:nvPr/>
+        </p:nvSpPr>
+        <p:spPr>
+          <a:xfrm>
+            <a:off x="934085" y="1209675"/>
+            <a:ext cx="5684520" cy="645160"/>
+          </a:xfrm>
+          <a:prstGeom prst="rect">
+            <a:avLst/>
+          </a:prstGeom>
+          <a:noFill/>
+        </p:spPr>
+        <p:txBody>
+          <a:bodyPr wrap="square" rtlCol="0">
+            <a:spAutoFit/>
+          </a:bodyPr>
+          <a:p>
+            <a:r>
+              <a:rPr lang="en-US" altLang="zh-CN"/>
+              <a:t>1.</a:t>
+            </a:r>
+            <a:r>
+              <a:rPr lang="zh-CN" altLang="en-US"/>
+              <a:t>用</a:t>
+            </a:r>
+            <a:r>
+              <a:rPr lang="en-US" altLang="zh-CN"/>
+              <a:t>python</a:t>
+            </a:r>
+            <a:r>
+              <a:rPr lang="zh-CN" altLang="en-US"/>
+              <a:t>编译器打开文件（此处用</a:t>
+            </a:r>
+            <a:r>
+              <a:rPr lang="en-US" altLang="zh-CN"/>
+              <a:t>pycharm</a:t>
+            </a:r>
+            <a:r>
+              <a:rPr lang="zh-CN" altLang="en-US"/>
+              <a:t>演示），在下载好所需库后直接运行即可（有延迟属正常</a:t>
+            </a:r>
+            <a:r>
+              <a:rPr lang="zh-CN" altLang="en-US"/>
+              <a:t>现象）</a:t>
+            </a:r>
+            <a:endParaRPr lang="zh-CN" altLang="en-US"/>
+          </a:p>
+        </p:txBody>
+      </p:sp>
       <p:pic>
         <p:nvPicPr>
-          <p:cNvPr id="5" name="图片 4" descr="屏幕截图 2026-06-04 225916"/>
+          <p:cNvPr id="7" name="图片 6" descr="屏幕截图 2026-09-10 222925"/>
+          <p:cNvPicPr>
+            <a:picLocks noChangeAspect="1"/>
+          </p:cNvPicPr>
+          <p:nvPr/>
+        </p:nvPicPr>
+        <p:blipFill>
+          <a:blip r:embed="rId1"/>
+          <a:srcRect l="17111" t="-151" r="-5655" b="49200"/>
+          <a:stretch>
+            <a:fillRect/>
+          </a:stretch>
+        </p:blipFill>
+        <p:spPr>
+          <a:xfrm>
+            <a:off x="934085" y="2067560"/>
+            <a:ext cx="7824470" cy="4288790"/>
+          </a:xfrm>
+          <a:prstGeom prst="rect">
+            <a:avLst/>
+          </a:prstGeom>
+        </p:spPr>
+      </p:pic>
+    </p:spTree>
+    <p:custDataLst>
+      <p:tags r:id="rId2"/>
+    </p:custDataLst>
+  </p:cSld>
+  <p:clrMapOvr>
+    <a:masterClrMapping/>
+  </p:clrMapOvr>
+</p:sld>
+</file>
+
+<file path=ppt/slides/slide3.xml><?xml version="1.0" encoding="utf-8"?>
+<p:sld xmlns:a="http://schemas.openxmlformats.org/drawingml/2006/main" xmlns:r="http://schemas.openxmlformats.org/officeDocument/2006/relationships" xmlns:p="http://schemas.openxmlformats.org/presentationml/2006/main">
+  <p:cSld>
+    <p:spTree>
+      <p:nvGrpSpPr>
+        <p:cNvPr id="1" name=""/>
+        <p:cNvGrpSpPr/>
+        <p:nvPr/>
+      </p:nvGrpSpPr>
+      <p:grpSpPr/>
+      <p:sp>
+        <p:nvSpPr>
+          <p:cNvPr id="6" name="文本框 5"/>
+          <p:cNvSpPr txBox="1"/>
+          <p:nvPr/>
+        </p:nvSpPr>
+        <p:spPr>
+          <a:xfrm>
+            <a:off x="934085" y="1209675"/>
+            <a:ext cx="5684520" cy="368300"/>
+          </a:xfrm>
+          <a:prstGeom prst="rect">
+            <a:avLst/>
+          </a:prstGeom>
+          <a:noFill/>
+        </p:spPr>
+        <p:txBody>
+          <a:bodyPr wrap="square" rtlCol="0">
+            <a:spAutoFit/>
+          </a:bodyPr>
+          <a:p>
+            <a:r>
+              <a:rPr lang="en-US" altLang="zh-CN">
+                <a:sym typeface="+mn-ea"/>
+              </a:rPr>
+              <a:t>2.</a:t>
+            </a:r>
+            <a:r>
+              <a:rPr lang="zh-CN" altLang="en-US">
+                <a:sym typeface="+mn-ea"/>
+              </a:rPr>
+              <a:t>读取表格文件（支持</a:t>
+            </a:r>
+            <a:r>
+              <a:rPr lang="en-US" altLang="zh-CN">
+                <a:sym typeface="+mn-ea"/>
+              </a:rPr>
+              <a:t>excel</a:t>
+            </a:r>
+            <a:r>
+              <a:rPr lang="zh-CN" altLang="en-US">
+                <a:sym typeface="+mn-ea"/>
+              </a:rPr>
+              <a:t>和</a:t>
+            </a:r>
+            <a:r>
+              <a:rPr lang="en-US" altLang="zh-CN">
+                <a:sym typeface="+mn-ea"/>
+              </a:rPr>
+              <a:t>csv</a:t>
+            </a:r>
+            <a:r>
+              <a:rPr lang="zh-CN" altLang="en-US">
+                <a:sym typeface="+mn-ea"/>
+              </a:rPr>
+              <a:t>）</a:t>
+            </a:r>
+            <a:endParaRPr lang="zh-CN" altLang="en-US"/>
+          </a:p>
+        </p:txBody>
+      </p:sp>
+      <p:pic>
+        <p:nvPicPr>
+          <p:cNvPr id="3" name="图片 2" descr="屏幕截图 2026-09-10 222534"/>
           <p:cNvPicPr>
             <a:picLocks noChangeAspect="1"/>
           </p:cNvPicPr>
@@ -3302,67 +3462,14 @@
         </p:blipFill>
         <p:spPr>
           <a:xfrm>
-            <a:off x="934085" y="2565400"/>
-            <a:ext cx="9119870" cy="3657600"/>
+            <a:off x="934085" y="1881505"/>
+            <a:ext cx="5901690" cy="4634230"/>
           </a:xfrm>
           <a:prstGeom prst="rect">
             <a:avLst/>
           </a:prstGeom>
         </p:spPr>
       </p:pic>
-      <p:sp>
-        <p:nvSpPr>
-          <p:cNvPr id="6" name="文本框 5"/>
-          <p:cNvSpPr txBox="1"/>
-          <p:nvPr/>
-        </p:nvSpPr>
-        <p:spPr>
-          <a:xfrm>
-            <a:off x="934085" y="1209675"/>
-            <a:ext cx="5684520" cy="645160"/>
-          </a:xfrm>
-          <a:prstGeom prst="rect">
-            <a:avLst/>
-          </a:prstGeom>
-          <a:noFill/>
-        </p:spPr>
-        <p:txBody>
-          <a:bodyPr wrap="square" rtlCol="0">
-            <a:spAutoFit/>
-          </a:bodyPr>
-          <a:p>
-            <a:r>
-              <a:rPr lang="en-US" altLang="zh-CN"/>
-              <a:t>1.</a:t>
-            </a:r>
-            <a:r>
-              <a:rPr lang="zh-CN" altLang="en-US"/>
-              <a:t>用</a:t>
-            </a:r>
-            <a:r>
-              <a:rPr lang="en-US" altLang="zh-CN"/>
-              <a:t>python</a:t>
-            </a:r>
-            <a:r>
-              <a:rPr lang="zh-CN" altLang="en-US"/>
-              <a:t>编译器打开文件（此处用</a:t>
-            </a:r>
-            <a:r>
-              <a:rPr lang="en-US" altLang="zh-CN"/>
-              <a:t>pycharm</a:t>
-            </a:r>
-            <a:r>
-              <a:rPr lang="zh-CN" altLang="en-US"/>
-              <a:t>演示），在下载好所需库后直接运行即可（有延迟属正常</a:t>
-            </a:r>
-            <a:r>
-              <a:rPr lang="zh-CN" altLang="en-US"/>
-              <a:t>现象）</a:t>
-            </a:r>
-            <a:endParaRPr lang="zh-CN" altLang="en-US"/>
-          </a:p>
-        </p:txBody>
-      </p:sp>
     </p:spTree>
     <p:custDataLst>
       <p:tags r:id="rId2"/>
@@ -3374,7 +3481,7 @@
 </p:sld>
 </file>
 
-<file path=ppt/slides/slide3.xml><?xml version="1.0" encoding="utf-8"?>
+<file path=ppt/slides/slide4.xml><?xml version="1.0" encoding="utf-8"?>
 <p:sld xmlns:a="http://schemas.openxmlformats.org/drawingml/2006/main" xmlns:r="http://schemas.openxmlformats.org/officeDocument/2006/relationships" xmlns:p="http://schemas.openxmlformats.org/presentationml/2006/main">
   <p:cSld>
     <p:spTree>
@@ -3392,8 +3499,8 @@
         </p:nvSpPr>
         <p:spPr>
           <a:xfrm>
-            <a:off x="934085" y="1209675"/>
-            <a:ext cx="5684520" cy="368300"/>
+            <a:off x="934085" y="746760"/>
+            <a:ext cx="6408420" cy="645160"/>
           </a:xfrm>
           <a:prstGeom prst="rect">
             <a:avLst/>
@@ -3406,40 +3513,27 @@
           </a:bodyPr>
           <a:p>
             <a:r>
-              <a:rPr lang="en-US" altLang="zh-CN">
-                <a:sym typeface="+mn-ea"/>
-              </a:rPr>
-              <a:t>2.</a:t>
-            </a:r>
-            <a:r>
-              <a:rPr lang="zh-CN" altLang="en-US">
-                <a:sym typeface="+mn-ea"/>
-              </a:rPr>
-              <a:t>读取表格文件（支持</a:t>
-            </a:r>
-            <a:r>
-              <a:rPr lang="en-US" altLang="zh-CN">
-                <a:sym typeface="+mn-ea"/>
-              </a:rPr>
-              <a:t>excel</a:t>
-            </a:r>
-            <a:r>
-              <a:rPr lang="zh-CN" altLang="en-US">
-                <a:sym typeface="+mn-ea"/>
-              </a:rPr>
-              <a:t>和</a:t>
-            </a:r>
-            <a:r>
-              <a:rPr lang="en-US" altLang="zh-CN">
-                <a:sym typeface="+mn-ea"/>
-              </a:rPr>
-              <a:t>csv</a:t>
-            </a:r>
-            <a:r>
-              <a:rPr lang="zh-CN" altLang="en-US">
-                <a:sym typeface="+mn-ea"/>
-              </a:rPr>
-              <a:t>）</a:t>
+              <a:rPr lang="en-US" altLang="zh-CN"/>
+              <a:t>3.</a:t>
+            </a:r>
+            <a:r>
+              <a:rPr lang="zh-CN" altLang="en-US"/>
+              <a:t>浏览统计</a:t>
+            </a:r>
+            <a:r>
+              <a:rPr lang="zh-CN" altLang="en-US"/>
+              <a:t>数据</a:t>
+            </a:r>
+            <a:endParaRPr lang="zh-CN" altLang="en-US"/>
+          </a:p>
+          <a:p>
+            <a:r>
+              <a:rPr lang="zh-CN" altLang="en-US"/>
+              <a:t>包含行数，列数，空值等，右上角按钮可把结果导出为</a:t>
+            </a:r>
+            <a:r>
+              <a:rPr lang="zh-CN" altLang="en-US"/>
+              <a:t>表格</a:t>
             </a:r>
             <a:endParaRPr lang="zh-CN" altLang="en-US"/>
           </a:p>
@@ -3447,7 +3541,7 @@
       </p:sp>
       <p:pic>
         <p:nvPicPr>
-          <p:cNvPr id="2" name="图片 1" descr="屏幕截图 2026-06-04 224443"/>
+          <p:cNvPr id="3" name="图片 2" descr="屏幕截图 2026-09-10 222549"/>
           <p:cNvPicPr>
             <a:picLocks noChangeAspect="1"/>
           </p:cNvPicPr>
@@ -3461,8 +3555,121 @@
         </p:blipFill>
         <p:spPr>
           <a:xfrm>
-            <a:off x="934085" y="2426970"/>
-            <a:ext cx="4890770" cy="3082925"/>
+            <a:off x="934085" y="1743710"/>
+            <a:ext cx="6235700" cy="4895850"/>
+          </a:xfrm>
+          <a:prstGeom prst="rect">
+            <a:avLst/>
+          </a:prstGeom>
+        </p:spPr>
+      </p:pic>
+    </p:spTree>
+    <p:custDataLst>
+      <p:tags r:id="rId2"/>
+    </p:custDataLst>
+  </p:cSld>
+  <p:clrMapOvr>
+    <a:masterClrMapping/>
+  </p:clrMapOvr>
+</p:sld>
+</file>
+
+<file path=ppt/slides/slide5.xml><?xml version="1.0" encoding="utf-8"?>
+<p:sld xmlns:a="http://schemas.openxmlformats.org/drawingml/2006/main" xmlns:r="http://schemas.openxmlformats.org/officeDocument/2006/relationships" xmlns:p="http://schemas.openxmlformats.org/presentationml/2006/main">
+  <p:cSld>
+    <p:spTree>
+      <p:nvGrpSpPr>
+        <p:cNvPr id="1" name=""/>
+        <p:cNvGrpSpPr/>
+        <p:nvPr/>
+      </p:nvGrpSpPr>
+      <p:grpSpPr/>
+      <p:sp>
+        <p:nvSpPr>
+          <p:cNvPr id="6" name="文本框 5"/>
+          <p:cNvSpPr txBox="1"/>
+          <p:nvPr/>
+        </p:nvSpPr>
+        <p:spPr>
+          <a:xfrm>
+            <a:off x="934085" y="675005"/>
+            <a:ext cx="8428355" cy="922020"/>
+          </a:xfrm>
+          <a:prstGeom prst="rect">
+            <a:avLst/>
+          </a:prstGeom>
+          <a:noFill/>
+        </p:spPr>
+        <p:txBody>
+          <a:bodyPr wrap="square" rtlCol="0">
+            <a:spAutoFit/>
+          </a:bodyPr>
+          <a:p>
+            <a:r>
+              <a:rPr lang="en-US" altLang="zh-CN"/>
+              <a:t>4.</a:t>
+            </a:r>
+            <a:r>
+              <a:rPr lang="zh-CN" altLang="en-US"/>
+              <a:t>图像</a:t>
+            </a:r>
+            <a:r>
+              <a:rPr lang="zh-CN" altLang="en-US"/>
+              <a:t>绘制</a:t>
+            </a:r>
+            <a:endParaRPr lang="zh-CN" altLang="en-US"/>
+          </a:p>
+          <a:p>
+            <a:r>
+              <a:rPr lang="zh-CN" altLang="en-US"/>
+              <a:t>在右侧选取需要的</a:t>
+            </a:r>
+            <a:r>
+              <a:rPr lang="en-US" altLang="zh-CN"/>
+              <a:t>X</a:t>
+            </a:r>
+            <a:r>
+              <a:rPr lang="zh-CN" altLang="en-US"/>
+              <a:t>和</a:t>
+            </a:r>
+            <a:r>
+              <a:rPr lang="en-US" altLang="zh-CN"/>
+              <a:t>Y</a:t>
+            </a:r>
+            <a:r>
+              <a:rPr lang="zh-CN" altLang="en-US"/>
+              <a:t>列，绘制散点图还可以增加颜色标尺（已过滤非数值列），再在左下角选择需要的类型即可，左下角按钮可导出图像为</a:t>
+            </a:r>
+            <a:r>
+              <a:rPr lang="en-US" altLang="zh-CN"/>
+              <a:t>PNG</a:t>
+            </a:r>
+            <a:r>
+              <a:rPr lang="zh-CN" altLang="en-US"/>
+              <a:t>图片</a:t>
+            </a:r>
+            <a:endParaRPr lang="zh-CN" altLang="en-US"/>
+          </a:p>
+        </p:txBody>
+      </p:sp>
+      <p:pic>
+        <p:nvPicPr>
+          <p:cNvPr id="2" name="图片 1" descr="屏幕截图 2026-09-10 222554"/>
+          <p:cNvPicPr>
+            <a:picLocks noChangeAspect="1"/>
+          </p:cNvPicPr>
+          <p:nvPr/>
+        </p:nvPicPr>
+        <p:blipFill>
+          <a:blip r:embed="rId1"/>
+          <a:stretch>
+            <a:fillRect/>
+          </a:stretch>
+        </p:blipFill>
+        <p:spPr>
+          <a:xfrm>
+            <a:off x="934085" y="1701800"/>
+            <a:ext cx="5161915" cy="4079240"/>
           </a:xfrm>
           <a:prstGeom prst="rect">
             <a:avLst/>
@@ -3471,7 +3678,7 @@
       </p:pic>
       <p:pic>
         <p:nvPicPr>
-          <p:cNvPr id="8" name="图片 7" descr="屏幕截图 2026-06-04 224510"/>
+          <p:cNvPr id="4" name="图片 3" descr="屏幕截图 2026-09-10 222619"/>
           <p:cNvPicPr>
             <a:picLocks noChangeAspect="1"/>
           </p:cNvPicPr>
@@ -3485,8 +3692,8 @@
         </p:blipFill>
         <p:spPr>
           <a:xfrm>
-            <a:off x="6560185" y="2429510"/>
-            <a:ext cx="4886960" cy="3080385"/>
+            <a:off x="6096000" y="1701800"/>
+            <a:ext cx="5923280" cy="4094480"/>
           </a:xfrm>
           <a:prstGeom prst="rect">
             <a:avLst/>
@@ -3504,7 +3711,7 @@
 </p:sld>
 </file>
 
-<file path=ppt/slides/slide4.xml><?xml version="1.0" encoding="utf-8"?>
+<file path=ppt/slides/slide6.xml><?xml version="1.0" encoding="utf-8"?>
 <p:sld xmlns:a="http://schemas.openxmlformats.org/drawingml/2006/main" xmlns:r="http://schemas.openxmlformats.org/officeDocument/2006/relationships" xmlns:p="http://schemas.openxmlformats.org/presentationml/2006/main">
   <p:cSld>
     <p:spTree>
@@ -3537,34 +3744,58 @@
           <a:p>
             <a:r>
               <a:rPr lang="en-US" altLang="zh-CN"/>
-              <a:t>3.</a:t>
+              <a:t>5.</a:t>
             </a:r>
             <a:r>
               <a:rPr lang="zh-CN" altLang="en-US"/>
-              <a:t>浏览统计</a:t>
+              <a:t>高级统计</a:t>
             </a:r>
             <a:r>
               <a:rPr lang="zh-CN" altLang="en-US"/>
-              <a:t>数据</a:t>
+              <a:t>方法</a:t>
             </a:r>
             <a:endParaRPr lang="zh-CN" altLang="en-US"/>
           </a:p>
           <a:p>
             <a:r>
               <a:rPr lang="zh-CN" altLang="en-US"/>
-              <a:t>包含行数，列数，空值</a:t>
+              <a:t>操作与</a:t>
+            </a:r>
+            <a:r>
+              <a:rPr lang="en-US" altLang="zh-CN"/>
+              <a:t>4</a:t>
             </a:r>
             <a:r>
               <a:rPr lang="zh-CN" altLang="en-US"/>
-              <a:t>等</a:t>
-            </a:r>
-            <a:endParaRPr lang="zh-CN" altLang="en-US"/>
+              <a:t>相同，点击</a:t>
+            </a:r>
+            <a:r>
+              <a:rPr lang="en-US" altLang="zh-CN"/>
+              <a:t>“</a:t>
+            </a:r>
+            <a:r>
+              <a:rPr lang="zh-CN" altLang="en-US"/>
+              <a:t>帮助</a:t>
+            </a:r>
+            <a:r>
+              <a:rPr lang="en-US" altLang="zh-CN"/>
+              <a:t>”</a:t>
+            </a:r>
+            <a:r>
+              <a:rPr lang="zh-CN" altLang="en-US"/>
+              <a:t>可以展示</a:t>
+            </a:r>
+            <a:r>
+              <a:rPr lang="zh-CN" altLang="en-US"/>
+              <a:t>部分参数的意义</a:t>
+            </a:r>
+            <a:endParaRPr lang="en-US" altLang="zh-CN"/>
           </a:p>
         </p:txBody>
       </p:sp>
       <p:pic>
         <p:nvPicPr>
-          <p:cNvPr id="2" name="图片 1" descr="屏幕截图 2026-06-04 224518"/>
+          <p:cNvPr id="2" name="图片 1" descr="屏幕截图 2026-09-10 222630"/>
           <p:cNvPicPr>
             <a:picLocks noChangeAspect="1"/>
           </p:cNvPicPr>
@@ -3578,8 +3809,8 @@
         </p:blipFill>
         <p:spPr>
           <a:xfrm>
-            <a:off x="934085" y="1927860"/>
-            <a:ext cx="6948170" cy="4378960"/>
+            <a:off x="934085" y="1617980"/>
+            <a:ext cx="6673850" cy="5240020"/>
           </a:xfrm>
           <a:prstGeom prst="rect">
             <a:avLst/>
@@ -3597,299 +3828,6 @@
 </p:sld>
 </file>
 
-<file path=ppt/slides/slide5.xml><?xml version="1.0" encoding="utf-8"?>
-<p:sld xmlns:a="http://schemas.openxmlformats.org/drawingml/2006/main" xmlns:r="http://schemas.openxmlformats.org/officeDocument/2006/relationships" xmlns:p="http://schemas.openxmlformats.org/presentationml/2006/main">
-  <p:cSld>
-    <p:spTree>
-      <p:nvGrpSpPr>
-        <p:cNvPr id="1" name=""/>
-        <p:cNvGrpSpPr/>
-        <p:nvPr/>
-      </p:nvGrpSpPr>
-      <p:grpSpPr/>
-      <p:sp>
-        <p:nvSpPr>
-          <p:cNvPr id="6" name="文本框 5"/>
-          <p:cNvSpPr txBox="1"/>
-          <p:nvPr/>
-        </p:nvSpPr>
-        <p:spPr>
-          <a:xfrm>
-            <a:off x="934085" y="675005"/>
-            <a:ext cx="7378700" cy="922020"/>
-          </a:xfrm>
-          <a:prstGeom prst="rect">
-            <a:avLst/>
-          </a:prstGeom>
-          <a:noFill/>
-        </p:spPr>
-        <p:txBody>
-          <a:bodyPr wrap="square" rtlCol="0">
-            <a:spAutoFit/>
-          </a:bodyPr>
-          <a:p>
-            <a:r>
-              <a:rPr lang="en-US" altLang="zh-CN"/>
-              <a:t>4.</a:t>
-            </a:r>
-            <a:r>
-              <a:rPr lang="zh-CN" altLang="en-US"/>
-              <a:t>图像</a:t>
-            </a:r>
-            <a:r>
-              <a:rPr lang="zh-CN" altLang="en-US"/>
-              <a:t>绘制</a:t>
-            </a:r>
-            <a:endParaRPr lang="zh-CN" altLang="en-US"/>
-          </a:p>
-          <a:p>
-            <a:r>
-              <a:rPr lang="zh-CN" altLang="en-US"/>
-              <a:t>在右侧选取需要的</a:t>
-            </a:r>
-            <a:r>
-              <a:rPr lang="en-US" altLang="zh-CN"/>
-              <a:t>X</a:t>
-            </a:r>
-            <a:r>
-              <a:rPr lang="zh-CN" altLang="en-US"/>
-              <a:t>和</a:t>
-            </a:r>
-            <a:r>
-              <a:rPr lang="en-US" altLang="zh-CN"/>
-              <a:t>Y</a:t>
-            </a:r>
-            <a:r>
-              <a:rPr lang="zh-CN" altLang="en-US"/>
-              <a:t>列（已过滤非数值列），再在左下角选择需要的类型</a:t>
-            </a:r>
-            <a:r>
-              <a:rPr lang="zh-CN" altLang="en-US"/>
-              <a:t>即可</a:t>
-            </a:r>
-            <a:endParaRPr lang="zh-CN" altLang="en-US"/>
-          </a:p>
-        </p:txBody>
-      </p:sp>
-      <p:pic>
-        <p:nvPicPr>
-          <p:cNvPr id="3" name="图片 2" descr="屏幕截图 2026-06-04 224524"/>
-          <p:cNvPicPr>
-            <a:picLocks noChangeAspect="1"/>
-          </p:cNvPicPr>
-          <p:nvPr/>
-        </p:nvPicPr>
-        <p:blipFill>
-          <a:blip r:embed="rId1"/>
-          <a:stretch>
-            <a:fillRect/>
-          </a:stretch>
-        </p:blipFill>
-        <p:spPr>
-          <a:xfrm>
-            <a:off x="934085" y="1990725"/>
-            <a:ext cx="7279640" cy="4587875"/>
-          </a:xfrm>
-          <a:prstGeom prst="rect">
-            <a:avLst/>
-          </a:prstGeom>
-        </p:spPr>
-      </p:pic>
-      <p:pic>
-        <p:nvPicPr>
-          <p:cNvPr id="5" name="图片 4" descr="箭头-拐角-左向下"/>
-          <p:cNvPicPr>
-            <a:picLocks noChangeAspect="1"/>
-          </p:cNvPicPr>
-          <p:nvPr>
-            <p:custDataLst>
-              <p:tags r:id="rId2"/>
-            </p:custDataLst>
-          </p:nvPr>
-        </p:nvPicPr>
-        <p:blipFill>
-          <a:blip r:embed="rId3">
-            <a:extLst>
-              <a:ext uri="{96DAC541-7B7A-43D3-8B79-37D633B846F1}">
-                <asvg:svgBlip xmlns:asvg="http://schemas.microsoft.com/office/drawing/2016/SVG/main" r:embed="rId4"/>
-              </a:ext>
-            </a:extLst>
-          </a:blip>
-          <a:stretch>
-            <a:fillRect/>
-          </a:stretch>
-        </p:blipFill>
-        <p:spPr>
-          <a:xfrm>
-            <a:off x="1330325" y="5105400"/>
-            <a:ext cx="547370" cy="547370"/>
-          </a:xfrm>
-          <a:prstGeom prst="rect">
-            <a:avLst/>
-          </a:prstGeom>
-        </p:spPr>
-      </p:pic>
-      <p:sp>
-        <p:nvSpPr>
-          <p:cNvPr id="7" name="文本框 6"/>
-          <p:cNvSpPr txBox="1"/>
-          <p:nvPr/>
-        </p:nvSpPr>
-        <p:spPr>
-          <a:xfrm>
-            <a:off x="1235075" y="4645025"/>
-            <a:ext cx="737870" cy="460375"/>
-          </a:xfrm>
-          <a:prstGeom prst="rect">
-            <a:avLst/>
-          </a:prstGeom>
-          <a:noFill/>
-        </p:spPr>
-        <p:txBody>
-          <a:bodyPr wrap="square" rtlCol="0">
-            <a:spAutoFit/>
-          </a:bodyPr>
-          <a:p>
-            <a:r>
-              <a:rPr lang="zh-CN" altLang="en-US" sz="1200"/>
-              <a:t>点击这里</a:t>
-            </a:r>
-            <a:r>
-              <a:rPr lang="zh-CN" altLang="en-US" sz="1200"/>
-              <a:t>绘制</a:t>
-            </a:r>
-            <a:endParaRPr lang="zh-CN" altLang="en-US" sz="1200"/>
-          </a:p>
-        </p:txBody>
-      </p:sp>
-    </p:spTree>
-    <p:custDataLst>
-      <p:tags r:id="rId5"/>
-    </p:custDataLst>
-  </p:cSld>
-  <p:clrMapOvr>
-    <a:masterClrMapping/>
-  </p:clrMapOvr>
-</p:sld>
-</file>
-
-<file path=ppt/slides/slide6.xml><?xml version="1.0" encoding="utf-8"?>
-<p:sld xmlns:a="http://schemas.openxmlformats.org/drawingml/2006/main" xmlns:r="http://schemas.openxmlformats.org/officeDocument/2006/relationships" xmlns:p="http://schemas.openxmlformats.org/presentationml/2006/main">
-  <p:cSld>
-    <p:spTree>
-      <p:nvGrpSpPr>
-        <p:cNvPr id="1" name=""/>
-        <p:cNvGrpSpPr/>
-        <p:nvPr/>
-      </p:nvGrpSpPr>
-      <p:grpSpPr/>
-      <p:sp>
-        <p:nvSpPr>
-          <p:cNvPr id="6" name="文本框 5"/>
-          <p:cNvSpPr txBox="1"/>
-          <p:nvPr/>
-        </p:nvSpPr>
-        <p:spPr>
-          <a:xfrm>
-            <a:off x="934085" y="746760"/>
-            <a:ext cx="5684520" cy="645160"/>
-          </a:xfrm>
-          <a:prstGeom prst="rect">
-            <a:avLst/>
-          </a:prstGeom>
-          <a:noFill/>
-        </p:spPr>
-        <p:txBody>
-          <a:bodyPr wrap="square" rtlCol="0">
-            <a:spAutoFit/>
-          </a:bodyPr>
-          <a:p>
-            <a:r>
-              <a:rPr lang="en-US" altLang="zh-CN"/>
-              <a:t>5.</a:t>
-            </a:r>
-            <a:r>
-              <a:rPr lang="zh-CN" altLang="en-US"/>
-              <a:t>高级统计</a:t>
-            </a:r>
-            <a:r>
-              <a:rPr lang="zh-CN" altLang="en-US"/>
-              <a:t>方法</a:t>
-            </a:r>
-            <a:endParaRPr lang="zh-CN" altLang="en-US"/>
-          </a:p>
-          <a:p>
-            <a:r>
-              <a:rPr lang="zh-CN" altLang="en-US"/>
-              <a:t>操作与</a:t>
-            </a:r>
-            <a:r>
-              <a:rPr lang="en-US" altLang="zh-CN"/>
-              <a:t>4</a:t>
-            </a:r>
-            <a:r>
-              <a:rPr lang="zh-CN" altLang="en-US"/>
-              <a:t>相同，点击</a:t>
-            </a:r>
-            <a:r>
-              <a:rPr lang="en-US" altLang="zh-CN"/>
-              <a:t>“</a:t>
-            </a:r>
-            <a:r>
-              <a:rPr lang="zh-CN" altLang="en-US"/>
-              <a:t>帮助</a:t>
-            </a:r>
-            <a:r>
-              <a:rPr lang="en-US" altLang="zh-CN"/>
-              <a:t>”</a:t>
-            </a:r>
-            <a:r>
-              <a:rPr lang="zh-CN" altLang="en-US"/>
-              <a:t>可以展示</a:t>
-            </a:r>
-            <a:r>
-              <a:rPr lang="zh-CN" altLang="en-US"/>
-              <a:t>部分参数的意义</a:t>
-            </a:r>
-            <a:endParaRPr lang="en-US" altLang="zh-CN"/>
-          </a:p>
-        </p:txBody>
-      </p:sp>
-      <p:pic>
-        <p:nvPicPr>
-          <p:cNvPr id="3" name="图片 2" descr="屏幕截图 2026-06-04 224532"/>
-          <p:cNvPicPr>
-            <a:picLocks noChangeAspect="1"/>
-          </p:cNvPicPr>
-          <p:nvPr/>
-        </p:nvPicPr>
-        <p:blipFill>
-          <a:blip r:embed="rId1"/>
-          <a:stretch>
-            <a:fillRect/>
-          </a:stretch>
-        </p:blipFill>
-        <p:spPr>
-          <a:xfrm>
-            <a:off x="934085" y="1927860"/>
-            <a:ext cx="6955790" cy="4384040"/>
-          </a:xfrm>
-          <a:prstGeom prst="rect">
-            <a:avLst/>
-          </a:prstGeom>
-        </p:spPr>
-      </p:pic>
-    </p:spTree>
-    <p:custDataLst>
-      <p:tags r:id="rId2"/>
-    </p:custDataLst>
-  </p:cSld>
-  <p:clrMapOvr>
-    <a:masterClrMapping/>
-  </p:clrMapOvr>
-</p:sld>
-</file>
-
 <file path=ppt/slides/slide7.xml><?xml version="1.0" encoding="utf-8"?>
 <p:sld xmlns:a="http://schemas.openxmlformats.org/drawingml/2006/main" xmlns:r="http://schemas.openxmlformats.org/officeDocument/2006/relationships" xmlns:p="http://schemas.openxmlformats.org/presentationml/2006/main">
   <p:cSld>
@@ -3909,7 +3847,7 @@
         <p:spPr>
           <a:xfrm>
             <a:off x="949325" y="703580"/>
-            <a:ext cx="7326630" cy="1476375"/>
+            <a:ext cx="7326630" cy="2306955"/>
           </a:xfrm>
           <a:prstGeom prst="rect">
             <a:avLst/>
@@ -3946,7 +3884,7 @@
             </a:r>
             <a:r>
               <a:rPr lang="zh-CN" altLang="en-US"/>
-              <a:t>，上线，包含基础</a:t>
+              <a:t>上线，包含基础</a:t>
             </a:r>
             <a:r>
               <a:rPr lang="zh-CN" altLang="en-US"/>
@@ -4005,6 +3943,33 @@
             <a:r>
               <a:rPr lang="zh-CN" altLang="en-US"/>
               <a:t>功能。</a:t>
+            </a:r>
+            <a:endParaRPr lang="zh-CN" altLang="en-US"/>
+          </a:p>
+          <a:p>
+            <a:r>
+              <a:rPr lang="en-US" altLang="zh-CN"/>
+              <a:t>2026.09.10</a:t>
+            </a:r>
+            <a:r>
+              <a:rPr lang="zh-CN" altLang="en-US"/>
+              <a:t>：</a:t>
+            </a:r>
+            <a:r>
+              <a:rPr lang="en-US" altLang="zh-CN"/>
+              <a:t>V4.1.0</a:t>
+            </a:r>
+            <a:r>
+              <a:rPr lang="zh-CN" altLang="en-US"/>
+              <a:t>，新增箱线图和热力图的绘制功能，允许在代码的常数区修改随机森林方法的参数，提高了程序的稳定</a:t>
+            </a:r>
+            <a:r>
+              <a:rPr lang="zh-CN" altLang="en-US"/>
+              <a:t>性，处理了部分冗余</a:t>
+            </a:r>
+            <a:r>
+              <a:rPr lang="zh-CN" altLang="en-US"/>
+              <a:t>代码。</a:t>
             </a:r>
             <a:endParaRPr lang="zh-CN" altLang="en-US"/>
           </a:p>
@@ -4840,12 +4805,6 @@
 
 <file path=ppt/tags/tag67.xml><?xml version="1.0" encoding="utf-8"?>
 <p:tagLst xmlns:p="http://schemas.openxmlformats.org/presentationml/2006/main">
-  <p:tag name="KSO_DOCER_RESOURCE_TRACE_INFO" val="{&quot;id&quot;:&quot;50062299&quot;,&quot;origin&quot;:0,&quot;type&quot;:&quot;icons&quot;,&quot;user&quot;:&quot;1729763635&quot;}"/>
-</p:tagLst>
-</file>
-
-<file path=ppt/tags/tag68.xml><?xml version="1.0" encoding="utf-8"?>
-<p:tagLst xmlns:p="http://schemas.openxmlformats.org/presentationml/2006/main">
   <p:tag name="KSO_WM_BEAUTIFY_FLAG" val="#wm#"/>
   <p:tag name="KSO_WM_TEMPLATE_CATEGORY" val="custom"/>
   <p:tag name="KSO_WM_TEMPLATE_INDEX" val="20205081"/>
@@ -4853,7 +4812,7 @@
 </p:tagLst>
 </file>
 
-<file path=ppt/tags/tag69.xml><?xml version="1.0" encoding="utf-8"?>
+<file path=ppt/tags/tag68.xml><?xml version="1.0" encoding="utf-8"?>
 <p:tagLst xmlns:p="http://schemas.openxmlformats.org/presentationml/2006/main">
   <p:tag name="KSO_WM_BEAUTIFY_FLAG" val="#wm#"/>
   <p:tag name="KSO_WM_TEMPLATE_CATEGORY" val="custom"/>
@@ -4861,20 +4820,7 @@
 </p:tagLst>
 </file>
 
-<file path=ppt/tags/tag7.xml><?xml version="1.0" encoding="utf-8"?>
-<p:tagLst xmlns:p="http://schemas.openxmlformats.org/presentationml/2006/main">
-  <p:tag name="KSO_WM_UNIT_HIGHLIGHT" val="0"/>
-  <p:tag name="KSO_WM_UNIT_COMPATIBLE" val="0"/>
-  <p:tag name="KSO_WM_UNIT_DIAGRAM_ISNUMVISUAL" val="0"/>
-  <p:tag name="KSO_WM_UNIT_DIAGRAM_ISREFERUNIT" val="0"/>
-  <p:tag name="KSO_WM_UNIT_ID" val="_2**"/>
-  <p:tag name="KSO_WM_UNIT_LAYERLEVEL" val="1"/>
-  <p:tag name="KSO_WM_TAG_VERSION" val="1.0"/>
-  <p:tag name="KSO_WM_BEAUTIFY_FLAG" val="#wm#"/>
-</p:tagLst>
-</file>
-
-<file path=ppt/tags/tag70.xml><?xml version="1.0" encoding="utf-8"?>
+<file path=ppt/tags/tag69.xml><?xml version="1.0" encoding="utf-8"?>
 <p:tagLst xmlns:p="http://schemas.openxmlformats.org/presentationml/2006/main">
   <p:tag name="KSO_WM_BEAUTIFY_FLAG" val="#wm#"/>
   <p:tag name="KSO_WM_TEMPLATE_CATEGORY" val="custom"/>
@@ -4882,7 +4828,20 @@
 </p:tagLst>
 </file>
 
-<file path=ppt/tags/tag71.xml><?xml version="1.0" encoding="utf-8"?>
+<file path=ppt/tags/tag7.xml><?xml version="1.0" encoding="utf-8"?>
+<p:tagLst xmlns:p="http://schemas.openxmlformats.org/presentationml/2006/main">
+  <p:tag name="KSO_WM_UNIT_HIGHLIGHT" val="0"/>
+  <p:tag name="KSO_WM_UNIT_COMPATIBLE" val="0"/>
+  <p:tag name="KSO_WM_UNIT_DIAGRAM_ISNUMVISUAL" val="0"/>
+  <p:tag name="KSO_WM_UNIT_DIAGRAM_ISREFERUNIT" val="0"/>
+  <p:tag name="KSO_WM_UNIT_ID" val="_2**"/>
+  <p:tag name="KSO_WM_UNIT_LAYERLEVEL" val="1"/>
+  <p:tag name="KSO_WM_TAG_VERSION" val="1.0"/>
+  <p:tag name="KSO_WM_BEAUTIFY_FLAG" val="#wm#"/>
+</p:tagLst>
+</file>
+
+<file path=ppt/tags/tag70.xml><?xml version="1.0" encoding="utf-8"?>
 <p:tagLst xmlns:p="http://schemas.openxmlformats.org/presentationml/2006/main">
   <p:tag name="resource_record_key" val="{&quot;10&quot;:[50062299],&quot;65&quot;:[20205081]}"/>
 </p:tagLst>
